--- a/ICCPROFILE_1002.pptx
+++ b/ICCPROFILE_1002.pptx
@@ -13686,7 +13686,7 @@
                 <a:ea typeface="標楷體" panose="03000509000000000000" pitchFamily="65" charset="-120"/>
                 <a:cs typeface="Times New Roman" panose="02020603050405020304" pitchFamily="18" charset="0"/>
               </a:rPr>
-              <a:t>校正後，螢幕的色溫</a:t>
+              <a:t>校正後的色溫</a:t>
             </a:r>
             <a:endParaRPr lang="en-US" altLang="zh-TW" sz="1600" dirty="0">
               <a:solidFill>
@@ -15049,7 +15049,7 @@
                         </a:spcAft>
                       </a:pPr>
                       <a:r>
-                        <a:rPr lang="en-US" sz="1800" b="0" kern="0">
+                        <a:rPr lang="en-US" sz="1800" b="0" kern="0" dirty="0">
                           <a:effectLst/>
                           <a:latin typeface="Times New Roman" panose="02020603050405020304" pitchFamily="18" charset="0"/>
                           <a:ea typeface="標楷體" panose="03000509000000000000" pitchFamily="65" charset="-120"/>
@@ -15057,7 +15057,7 @@
                         </a:rPr>
                         <a:t>9300</a:t>
                       </a:r>
-                      <a:endParaRPr lang="zh-TW" sz="1800" b="0" kern="100">
+                      <a:endParaRPr lang="zh-TW" sz="1800" b="0" kern="100" dirty="0">
                         <a:effectLst/>
                         <a:latin typeface="Times New Roman" panose="02020603050405020304" pitchFamily="18" charset="0"/>
                         <a:ea typeface="標楷體" panose="03000509000000000000" pitchFamily="65" charset="-120"/>
